--- a/02-product-case-studies/taash-tax-automation/Deck/Executive_Deck.pptx
+++ b/02-product-case-studies/taash-tax-automation/Deck/Executive_Deck.pptx
@@ -1391,7 +1391,7 @@
     <p:bg>
       <p:bgPr>
         <a:solidFill>
-          <a:srgbClr val="15253D"/>
+          <a:srgbClr val="FFFFFF"/>
         </a:solidFill>
       </p:bgPr>
     </p:bg>
@@ -1436,7 +1436,7 @@
             <a:r>
               <a:rPr lang="en-US" sz="1300" b="1" spc="200" kern="0" dirty="0">
                 <a:solidFill>
-                  <a:srgbClr val="5EEAD4"/>
+                  <a:srgbClr val="2468A8"/>
                 </a:solidFill>
                 <a:latin typeface="Arial" pitchFamily="34" charset="0"/>
                 <a:ea typeface="Arial" pitchFamily="34" charset="-122"/>
@@ -1457,7 +1457,7 @@
         <p:spPr>
           <a:xfrm>
             <a:off x="731520" y="1645920"/>
-            <a:ext cx="10515600" cy="1463040"/>
+            <a:ext cx="7620000" cy="1463040"/>
           </a:xfrm>
           <a:prstGeom prst="rect">
             <a:avLst/>
@@ -1475,7 +1475,7 @@
             <a:r>
               <a:rPr lang="en-US" sz="4000" b="1" dirty="0">
                 <a:solidFill>
-                  <a:srgbClr val="FFFFFF"/>
+                  <a:srgbClr val="000030"/>
                 </a:solidFill>
                 <a:latin typeface="Arial" pitchFamily="34" charset="0"/>
                 <a:ea typeface="Arial" pitchFamily="34" charset="-122"/>
@@ -1514,7 +1514,7 @@
             <a:r>
               <a:rPr lang="en-US" sz="1800" dirty="0">
                 <a:solidFill>
-                  <a:srgbClr val="CBD5E1"/>
+                  <a:srgbClr val="4B5563"/>
                 </a:solidFill>
                 <a:latin typeface="Arial" pitchFamily="34" charset="0"/>
                 <a:ea typeface="Arial" pitchFamily="34" charset="-122"/>
@@ -1543,7 +1543,7 @@
           <a:noFill/>
           <a:ln w="25400">
             <a:solidFill>
-              <a:srgbClr val="5EEAD4"/>
+              <a:srgbClr val="2468A8"/>
             </a:solidFill>
             <a:prstDash val="solid"/>
           </a:ln>
@@ -1579,7 +1579,7 @@
             <a:r>
               <a:rPr lang="en-US" sz="1400" b="1" dirty="0">
                 <a:solidFill>
-                  <a:srgbClr val="E2E8F0"/>
+                  <a:srgbClr val="1F2937"/>
                 </a:solidFill>
                 <a:latin typeface="Arial" pitchFamily="34" charset="0"/>
                 <a:ea typeface="Arial" pitchFamily="34" charset="-122"/>
@@ -1596,7 +1596,7 @@
             <a:r>
               <a:rPr lang="en-US" sz="1400" dirty="0">
                 <a:solidFill>
-                  <a:srgbClr val="E2E8F0"/>
+                  <a:srgbClr val="1F2937"/>
                 </a:solidFill>
                 <a:latin typeface="Arial" pitchFamily="34" charset="0"/>
                 <a:ea typeface="Arial" pitchFamily="34" charset="-122"/>
@@ -1616,7 +1616,7 @@
             <a:r>
               <a:rPr lang="en-US" sz="1400" b="1" dirty="0">
                 <a:solidFill>
-                  <a:srgbClr val="E2E8F0"/>
+                  <a:srgbClr val="1F2937"/>
                 </a:solidFill>
                 <a:latin typeface="Arial" pitchFamily="34" charset="0"/>
                 <a:ea typeface="Arial" pitchFamily="34" charset="-122"/>
@@ -1633,7 +1633,7 @@
             <a:r>
               <a:rPr lang="en-US" sz="1400" dirty="0">
                 <a:solidFill>
-                  <a:srgbClr val="E2E8F0"/>
+                  <a:srgbClr val="1F2937"/>
                 </a:solidFill>
                 <a:latin typeface="Arial" pitchFamily="34" charset="0"/>
                 <a:ea typeface="Arial" pitchFamily="34" charset="-122"/>
@@ -1653,7 +1653,7 @@
             <a:r>
               <a:rPr lang="en-US" sz="1400" b="1" dirty="0">
                 <a:solidFill>
-                  <a:srgbClr val="E2E8F0"/>
+                  <a:srgbClr val="1F2937"/>
                 </a:solidFill>
                 <a:latin typeface="Arial" pitchFamily="34" charset="0"/>
                 <a:ea typeface="Arial" pitchFamily="34" charset="-122"/>
@@ -1670,7 +1670,7 @@
             <a:r>
               <a:rPr lang="en-US" sz="1400" dirty="0">
                 <a:solidFill>
-                  <a:srgbClr val="E2E8F0"/>
+                  <a:srgbClr val="1F2937"/>
                 </a:solidFill>
                 <a:latin typeface="Arial" pitchFamily="34" charset="0"/>
                 <a:ea typeface="Arial" pitchFamily="34" charset="-122"/>
@@ -1682,6 +1682,118 @@
           </a:p>
         </p:txBody>
       </p:sp>
+      <p:sp>
+        <p:nvSpPr>
+          <p:cNvPr id="7" name="Rectangle 6"/>
+          <p:cNvSpPr/>
+          <p:nvPr/>
+        </p:nvSpPr>
+        <p:spPr>
+          <a:xfrm>
+            <a:off x="0" y="0"/>
+            <a:ext cx="320040" cy="6858000"/>
+          </a:xfrm>
+          <a:prstGeom prst="rect">
+            <a:avLst/>
+          </a:prstGeom>
+          <a:solidFill>
+            <a:srgbClr val="000030"/>
+          </a:solidFill>
+          <a:ln>
+            <a:noFill/>
+          </a:ln>
+          <a:effectLst/>
+        </p:spPr>
+        <p:style>
+          <a:lnRef idx="1">
+            <a:schemeClr val="accent1"/>
+          </a:lnRef>
+          <a:fillRef idx="3">
+            <a:schemeClr val="accent1"/>
+          </a:fillRef>
+          <a:effectRef idx="2">
+            <a:schemeClr val="accent1"/>
+          </a:effectRef>
+          <a:fontRef idx="minor">
+            <a:schemeClr val="lt1"/>
+          </a:fontRef>
+        </p:style>
+        <p:txBody>
+          <a:bodyPr rtlCol="0" anchor="ctr"/>
+          <a:lstStyle/>
+          <a:p>
+            <a:pPr algn="ctr"/>
+          </a:p>
+        </p:txBody>
+      </p:sp>
+      <p:sp>
+        <p:nvSpPr>
+          <p:cNvPr id="8" name="Rectangle 7"/>
+          <p:cNvSpPr/>
+          <p:nvPr/>
+        </p:nvSpPr>
+        <p:spPr>
+          <a:xfrm>
+            <a:off x="320040" y="0"/>
+            <a:ext cx="73152" cy="6858000"/>
+          </a:xfrm>
+          <a:prstGeom prst="rect">
+            <a:avLst/>
+          </a:prstGeom>
+          <a:solidFill>
+            <a:srgbClr val="3078C0"/>
+          </a:solidFill>
+          <a:ln>
+            <a:noFill/>
+          </a:ln>
+          <a:effectLst/>
+        </p:spPr>
+        <p:style>
+          <a:lnRef idx="1">
+            <a:schemeClr val="accent1"/>
+          </a:lnRef>
+          <a:fillRef idx="3">
+            <a:schemeClr val="accent1"/>
+          </a:fillRef>
+          <a:effectRef idx="2">
+            <a:schemeClr val="accent1"/>
+          </a:effectRef>
+          <a:fontRef idx="minor">
+            <a:schemeClr val="lt1"/>
+          </a:fontRef>
+        </p:style>
+        <p:txBody>
+          <a:bodyPr rtlCol="0" anchor="ctr"/>
+          <a:lstStyle/>
+          <a:p>
+            <a:pPr algn="ctr"/>
+          </a:p>
+        </p:txBody>
+      </p:sp>
+      <p:pic>
+        <p:nvPicPr>
+          <p:cNvPr id="9" name="Picture 8" descr="taash_logo.png"/>
+          <p:cNvPicPr>
+            <a:picLocks noChangeAspect="1"/>
+          </p:cNvPicPr>
+          <p:nvPr/>
+        </p:nvPicPr>
+        <p:blipFill>
+          <a:blip r:embed="rId3"/>
+          <a:stretch>
+            <a:fillRect/>
+          </a:stretch>
+        </p:blipFill>
+        <p:spPr>
+          <a:xfrm>
+            <a:off x="8442960" y="925396"/>
+            <a:ext cx="3108960" cy="983848"/>
+          </a:xfrm>
+          <a:prstGeom prst="rect">
+            <a:avLst/>
+          </a:prstGeom>
+        </p:spPr>
+      </p:pic>
     </p:spTree>
   </p:cSld>
   <p:clrMapOvr>
@@ -1741,7 +1853,7 @@
             <a:r>
               <a:rPr lang="en-US" sz="2600" b="1" dirty="0">
                 <a:solidFill>
-                  <a:srgbClr val="15253D"/>
+                  <a:srgbClr val="000030"/>
                 </a:solidFill>
                 <a:latin typeface="Arial" pitchFamily="34" charset="0"/>
                 <a:ea typeface="Arial" pitchFamily="34" charset="-122"/>
@@ -1768,11 +1880,11 @@
             <a:avLst/>
           </a:prstGeom>
           <a:solidFill>
-            <a:srgbClr val="F4F7FB"/>
+            <a:srgbClr val="F2F7FC"/>
           </a:solidFill>
           <a:ln w="12700">
             <a:solidFill>
-              <a:srgbClr val="F4F7FB"/>
+              <a:srgbClr val="F2F7FC"/>
             </a:solidFill>
             <a:prstDash val="solid"/>
           </a:ln>
@@ -1805,7 +1917,7 @@
             <a:r>
               <a:rPr lang="en-US" sz="1400" b="1" dirty="0">
                 <a:solidFill>
-                  <a:srgbClr val="0F766E"/>
+                  <a:srgbClr val="2468A8"/>
                 </a:solidFill>
                 <a:latin typeface="Arial" pitchFamily="34" charset="0"/>
                 <a:ea typeface="Arial" pitchFamily="34" charset="-122"/>
@@ -1883,7 +1995,7 @@
             <a:r>
               <a:rPr lang="en-US" sz="1400" b="1" dirty="0">
                 <a:solidFill>
-                  <a:srgbClr val="0F766E"/>
+                  <a:srgbClr val="2468A8"/>
                 </a:solidFill>
                 <a:latin typeface="Arial" pitchFamily="34" charset="0"/>
                 <a:ea typeface="Arial" pitchFamily="34" charset="-122"/>
@@ -1910,11 +2022,11 @@
             <a:avLst/>
           </a:prstGeom>
           <a:solidFill>
-            <a:srgbClr val="EA580C"/>
+            <a:srgbClr val="3078C0"/>
           </a:solidFill>
           <a:ln w="12700">
             <a:solidFill>
-              <a:srgbClr val="EA580C"/>
+              <a:srgbClr val="3078C0"/>
             </a:solidFill>
             <a:prstDash val="solid"/>
           </a:ln>
@@ -2013,11 +2125,11 @@
             <a:avLst/>
           </a:prstGeom>
           <a:solidFill>
-            <a:srgbClr val="EA580C"/>
+            <a:srgbClr val="3078C0"/>
           </a:solidFill>
           <a:ln w="12700">
             <a:solidFill>
-              <a:srgbClr val="EA580C"/>
+              <a:srgbClr val="3078C0"/>
             </a:solidFill>
             <a:prstDash val="solid"/>
           </a:ln>
@@ -2116,11 +2228,11 @@
             <a:avLst/>
           </a:prstGeom>
           <a:solidFill>
-            <a:srgbClr val="EA580C"/>
+            <a:srgbClr val="3078C0"/>
           </a:solidFill>
           <a:ln w="12700">
             <a:solidFill>
-              <a:srgbClr val="EA580C"/>
+              <a:srgbClr val="3078C0"/>
             </a:solidFill>
             <a:prstDash val="solid"/>
           </a:ln>
@@ -2282,6 +2394,118 @@
           </a:p>
         </p:txBody>
       </p:sp>
+      <p:sp>
+        <p:nvSpPr>
+          <p:cNvPr id="18" name="Rectangle 17"/>
+          <p:cNvSpPr/>
+          <p:nvPr/>
+        </p:nvSpPr>
+        <p:spPr>
+          <a:xfrm>
+            <a:off x="0" y="0"/>
+            <a:ext cx="12192000" cy="82296"/>
+          </a:xfrm>
+          <a:prstGeom prst="rect">
+            <a:avLst/>
+          </a:prstGeom>
+          <a:solidFill>
+            <a:srgbClr val="000030"/>
+          </a:solidFill>
+          <a:ln>
+            <a:noFill/>
+          </a:ln>
+          <a:effectLst/>
+        </p:spPr>
+        <p:style>
+          <a:lnRef idx="1">
+            <a:schemeClr val="accent1"/>
+          </a:lnRef>
+          <a:fillRef idx="3">
+            <a:schemeClr val="accent1"/>
+          </a:fillRef>
+          <a:effectRef idx="2">
+            <a:schemeClr val="accent1"/>
+          </a:effectRef>
+          <a:fontRef idx="minor">
+            <a:schemeClr val="lt1"/>
+          </a:fontRef>
+        </p:style>
+        <p:txBody>
+          <a:bodyPr rtlCol="0" anchor="ctr"/>
+          <a:lstStyle/>
+          <a:p>
+            <a:pPr algn="ctr"/>
+          </a:p>
+        </p:txBody>
+      </p:sp>
+      <p:sp>
+        <p:nvSpPr>
+          <p:cNvPr id="19" name="Rectangle 18"/>
+          <p:cNvSpPr/>
+          <p:nvPr/>
+        </p:nvSpPr>
+        <p:spPr>
+          <a:xfrm>
+            <a:off x="0" y="82296"/>
+            <a:ext cx="1463040" cy="45720"/>
+          </a:xfrm>
+          <a:prstGeom prst="rect">
+            <a:avLst/>
+          </a:prstGeom>
+          <a:solidFill>
+            <a:srgbClr val="3078C0"/>
+          </a:solidFill>
+          <a:ln>
+            <a:noFill/>
+          </a:ln>
+          <a:effectLst/>
+        </p:spPr>
+        <p:style>
+          <a:lnRef idx="1">
+            <a:schemeClr val="accent1"/>
+          </a:lnRef>
+          <a:fillRef idx="3">
+            <a:schemeClr val="accent1"/>
+          </a:fillRef>
+          <a:effectRef idx="2">
+            <a:schemeClr val="accent1"/>
+          </a:effectRef>
+          <a:fontRef idx="minor">
+            <a:schemeClr val="lt1"/>
+          </a:fontRef>
+        </p:style>
+        <p:txBody>
+          <a:bodyPr rtlCol="0" anchor="ctr"/>
+          <a:lstStyle/>
+          <a:p>
+            <a:pPr algn="ctr"/>
+          </a:p>
+        </p:txBody>
+      </p:sp>
+      <p:pic>
+        <p:nvPicPr>
+          <p:cNvPr id="20" name="Picture 19" descr="taash_logo.png"/>
+          <p:cNvPicPr>
+            <a:picLocks noChangeAspect="1"/>
+          </p:cNvPicPr>
+          <p:nvPr/>
+        </p:nvPicPr>
+        <p:blipFill>
+          <a:blip r:embed="rId3"/>
+          <a:stretch>
+            <a:fillRect/>
+          </a:stretch>
+        </p:blipFill>
+        <p:spPr>
+          <a:xfrm>
+            <a:off x="10363200" y="6369664"/>
+            <a:ext cx="1005840" cy="318303"/>
+          </a:xfrm>
+          <a:prstGeom prst="rect">
+            <a:avLst/>
+          </a:prstGeom>
+        </p:spPr>
+      </p:pic>
     </p:spTree>
   </p:cSld>
   <p:clrMapOvr>
@@ -2341,7 +2565,7 @@
             <a:r>
               <a:rPr lang="en-US" sz="2600" b="1" dirty="0">
                 <a:solidFill>
-                  <a:srgbClr val="15253D"/>
+                  <a:srgbClr val="000030"/>
                 </a:solidFill>
                 <a:latin typeface="Arial" pitchFamily="34" charset="0"/>
                 <a:ea typeface="Arial" pitchFamily="34" charset="-122"/>
@@ -2494,6 +2718,118 @@
           </a:p>
         </p:txBody>
       </p:sp>
+      <p:sp>
+        <p:nvSpPr>
+          <p:cNvPr id="7" name="Rectangle 6"/>
+          <p:cNvSpPr/>
+          <p:nvPr/>
+        </p:nvSpPr>
+        <p:spPr>
+          <a:xfrm>
+            <a:off x="0" y="0"/>
+            <a:ext cx="12192000" cy="82296"/>
+          </a:xfrm>
+          <a:prstGeom prst="rect">
+            <a:avLst/>
+          </a:prstGeom>
+          <a:solidFill>
+            <a:srgbClr val="000030"/>
+          </a:solidFill>
+          <a:ln>
+            <a:noFill/>
+          </a:ln>
+          <a:effectLst/>
+        </p:spPr>
+        <p:style>
+          <a:lnRef idx="1">
+            <a:schemeClr val="accent1"/>
+          </a:lnRef>
+          <a:fillRef idx="3">
+            <a:schemeClr val="accent1"/>
+          </a:fillRef>
+          <a:effectRef idx="2">
+            <a:schemeClr val="accent1"/>
+          </a:effectRef>
+          <a:fontRef idx="minor">
+            <a:schemeClr val="lt1"/>
+          </a:fontRef>
+        </p:style>
+        <p:txBody>
+          <a:bodyPr rtlCol="0" anchor="ctr"/>
+          <a:lstStyle/>
+          <a:p>
+            <a:pPr algn="ctr"/>
+          </a:p>
+        </p:txBody>
+      </p:sp>
+      <p:sp>
+        <p:nvSpPr>
+          <p:cNvPr id="8" name="Rectangle 7"/>
+          <p:cNvSpPr/>
+          <p:nvPr/>
+        </p:nvSpPr>
+        <p:spPr>
+          <a:xfrm>
+            <a:off x="0" y="82296"/>
+            <a:ext cx="1463040" cy="45720"/>
+          </a:xfrm>
+          <a:prstGeom prst="rect">
+            <a:avLst/>
+          </a:prstGeom>
+          <a:solidFill>
+            <a:srgbClr val="3078C0"/>
+          </a:solidFill>
+          <a:ln>
+            <a:noFill/>
+          </a:ln>
+          <a:effectLst/>
+        </p:spPr>
+        <p:style>
+          <a:lnRef idx="1">
+            <a:schemeClr val="accent1"/>
+          </a:lnRef>
+          <a:fillRef idx="3">
+            <a:schemeClr val="accent1"/>
+          </a:fillRef>
+          <a:effectRef idx="2">
+            <a:schemeClr val="accent1"/>
+          </a:effectRef>
+          <a:fontRef idx="minor">
+            <a:schemeClr val="lt1"/>
+          </a:fontRef>
+        </p:style>
+        <p:txBody>
+          <a:bodyPr rtlCol="0" anchor="ctr"/>
+          <a:lstStyle/>
+          <a:p>
+            <a:pPr algn="ctr"/>
+          </a:p>
+        </p:txBody>
+      </p:sp>
+      <p:pic>
+        <p:nvPicPr>
+          <p:cNvPr id="9" name="Picture 8" descr="taash_logo.png"/>
+          <p:cNvPicPr>
+            <a:picLocks noChangeAspect="1"/>
+          </p:cNvPicPr>
+          <p:nvPr/>
+        </p:nvPicPr>
+        <p:blipFill>
+          <a:blip r:embed="rId4"/>
+          <a:stretch>
+            <a:fillRect/>
+          </a:stretch>
+        </p:blipFill>
+        <p:spPr>
+          <a:xfrm>
+            <a:off x="10363200" y="6369664"/>
+            <a:ext cx="1005840" cy="318303"/>
+          </a:xfrm>
+          <a:prstGeom prst="rect">
+            <a:avLst/>
+          </a:prstGeom>
+        </p:spPr>
+      </p:pic>
     </p:spTree>
   </p:cSld>
   <p:clrMapOvr>
@@ -2553,7 +2889,7 @@
             <a:r>
               <a:rPr lang="en-US" sz="2600" b="1" dirty="0">
                 <a:solidFill>
-                  <a:srgbClr val="15253D"/>
+                  <a:srgbClr val="000030"/>
                 </a:solidFill>
                 <a:latin typeface="Arial" pitchFamily="34" charset="0"/>
                 <a:ea typeface="Arial" pitchFamily="34" charset="-122"/>
@@ -2706,6 +3042,118 @@
           </a:p>
         </p:txBody>
       </p:sp>
+      <p:sp>
+        <p:nvSpPr>
+          <p:cNvPr id="7" name="Rectangle 6"/>
+          <p:cNvSpPr/>
+          <p:nvPr/>
+        </p:nvSpPr>
+        <p:spPr>
+          <a:xfrm>
+            <a:off x="0" y="0"/>
+            <a:ext cx="12192000" cy="82296"/>
+          </a:xfrm>
+          <a:prstGeom prst="rect">
+            <a:avLst/>
+          </a:prstGeom>
+          <a:solidFill>
+            <a:srgbClr val="000030"/>
+          </a:solidFill>
+          <a:ln>
+            <a:noFill/>
+          </a:ln>
+          <a:effectLst/>
+        </p:spPr>
+        <p:style>
+          <a:lnRef idx="1">
+            <a:schemeClr val="accent1"/>
+          </a:lnRef>
+          <a:fillRef idx="3">
+            <a:schemeClr val="accent1"/>
+          </a:fillRef>
+          <a:effectRef idx="2">
+            <a:schemeClr val="accent1"/>
+          </a:effectRef>
+          <a:fontRef idx="minor">
+            <a:schemeClr val="lt1"/>
+          </a:fontRef>
+        </p:style>
+        <p:txBody>
+          <a:bodyPr rtlCol="0" anchor="ctr"/>
+          <a:lstStyle/>
+          <a:p>
+            <a:pPr algn="ctr"/>
+          </a:p>
+        </p:txBody>
+      </p:sp>
+      <p:sp>
+        <p:nvSpPr>
+          <p:cNvPr id="8" name="Rectangle 7"/>
+          <p:cNvSpPr/>
+          <p:nvPr/>
+        </p:nvSpPr>
+        <p:spPr>
+          <a:xfrm>
+            <a:off x="0" y="82296"/>
+            <a:ext cx="1463040" cy="45720"/>
+          </a:xfrm>
+          <a:prstGeom prst="rect">
+            <a:avLst/>
+          </a:prstGeom>
+          <a:solidFill>
+            <a:srgbClr val="3078C0"/>
+          </a:solidFill>
+          <a:ln>
+            <a:noFill/>
+          </a:ln>
+          <a:effectLst/>
+        </p:spPr>
+        <p:style>
+          <a:lnRef idx="1">
+            <a:schemeClr val="accent1"/>
+          </a:lnRef>
+          <a:fillRef idx="3">
+            <a:schemeClr val="accent1"/>
+          </a:fillRef>
+          <a:effectRef idx="2">
+            <a:schemeClr val="accent1"/>
+          </a:effectRef>
+          <a:fontRef idx="minor">
+            <a:schemeClr val="lt1"/>
+          </a:fontRef>
+        </p:style>
+        <p:txBody>
+          <a:bodyPr rtlCol="0" anchor="ctr"/>
+          <a:lstStyle/>
+          <a:p>
+            <a:pPr algn="ctr"/>
+          </a:p>
+        </p:txBody>
+      </p:sp>
+      <p:pic>
+        <p:nvPicPr>
+          <p:cNvPr id="9" name="Picture 8" descr="taash_logo.png"/>
+          <p:cNvPicPr>
+            <a:picLocks noChangeAspect="1"/>
+          </p:cNvPicPr>
+          <p:nvPr/>
+        </p:nvPicPr>
+        <p:blipFill>
+          <a:blip r:embed="rId4"/>
+          <a:stretch>
+            <a:fillRect/>
+          </a:stretch>
+        </p:blipFill>
+        <p:spPr>
+          <a:xfrm>
+            <a:off x="10363200" y="6369664"/>
+            <a:ext cx="1005840" cy="318303"/>
+          </a:xfrm>
+          <a:prstGeom prst="rect">
+            <a:avLst/>
+          </a:prstGeom>
+        </p:spPr>
+      </p:pic>
     </p:spTree>
   </p:cSld>
   <p:clrMapOvr>
@@ -2765,7 +3213,7 @@
             <a:r>
               <a:rPr lang="en-US" sz="2600" b="1" dirty="0">
                 <a:solidFill>
-                  <a:srgbClr val="15253D"/>
+                  <a:srgbClr val="000030"/>
                 </a:solidFill>
                 <a:latin typeface="Arial" pitchFamily="34" charset="0"/>
                 <a:ea typeface="Arial" pitchFamily="34" charset="-122"/>
@@ -2834,7 +3282,7 @@
                   <a:tcPr marL="109728" marR="109728" marT="109728" marB="109728" anchor="ctr">
                     <a:lnL w="9525" cap="flat" cmpd="sng" algn="ctr">
                       <a:solidFill>
-                        <a:srgbClr val="D5DDE8"/>
+                        <a:srgbClr val="D5E3F2"/>
                       </a:solidFill>
                       <a:prstDash val="solid"/>
                       <a:round/>
@@ -2843,7 +3291,7 @@
                     </a:lnL>
                     <a:lnR w="9525" cap="flat" cmpd="sng" algn="ctr">
                       <a:solidFill>
-                        <a:srgbClr val="D5DDE8"/>
+                        <a:srgbClr val="D5E3F2"/>
                       </a:solidFill>
                       <a:prstDash val="solid"/>
                       <a:round/>
@@ -2852,7 +3300,7 @@
                     </a:lnR>
                     <a:lnT w="9525" cap="flat" cmpd="sng" algn="ctr">
                       <a:solidFill>
-                        <a:srgbClr val="D5DDE8"/>
+                        <a:srgbClr val="D5E3F2"/>
                       </a:solidFill>
                       <a:prstDash val="solid"/>
                       <a:round/>
@@ -2861,7 +3309,7 @@
                     </a:lnT>
                     <a:lnB w="9525" cap="flat" cmpd="sng" algn="ctr">
                       <a:solidFill>
-                        <a:srgbClr val="D5DDE8"/>
+                        <a:srgbClr val="D5E3F2"/>
                       </a:solidFill>
                       <a:prstDash val="solid"/>
                       <a:round/>
@@ -2869,7 +3317,7 @@
                       <a:tailEnd type="none" w="med" len="med"/>
                     </a:lnB>
                     <a:solidFill>
-                      <a:srgbClr val="15253D"/>
+                      <a:srgbClr val="000030"/>
                     </a:solidFill>
                   </a:tcPr>
                 </a:tc>
@@ -2902,7 +3350,7 @@
                   <a:tcPr marL="109728" marR="109728" marT="109728" marB="109728" anchor="ctr">
                     <a:lnL w="9525" cap="flat" cmpd="sng" algn="ctr">
                       <a:solidFill>
-                        <a:srgbClr val="D5DDE8"/>
+                        <a:srgbClr val="D5E3F2"/>
                       </a:solidFill>
                       <a:prstDash val="solid"/>
                       <a:round/>
@@ -2911,7 +3359,7 @@
                     </a:lnL>
                     <a:lnR w="9525" cap="flat" cmpd="sng" algn="ctr">
                       <a:solidFill>
-                        <a:srgbClr val="D5DDE8"/>
+                        <a:srgbClr val="D5E3F2"/>
                       </a:solidFill>
                       <a:prstDash val="solid"/>
                       <a:round/>
@@ -2920,7 +3368,7 @@
                     </a:lnR>
                     <a:lnT w="9525" cap="flat" cmpd="sng" algn="ctr">
                       <a:solidFill>
-                        <a:srgbClr val="D5DDE8"/>
+                        <a:srgbClr val="D5E3F2"/>
                       </a:solidFill>
                       <a:prstDash val="solid"/>
                       <a:round/>
@@ -2929,7 +3377,7 @@
                     </a:lnT>
                     <a:lnB w="9525" cap="flat" cmpd="sng" algn="ctr">
                       <a:solidFill>
-                        <a:srgbClr val="D5DDE8"/>
+                        <a:srgbClr val="D5E3F2"/>
                       </a:solidFill>
                       <a:prstDash val="solid"/>
                       <a:round/>
@@ -2937,7 +3385,7 @@
                       <a:tailEnd type="none" w="med" len="med"/>
                     </a:lnB>
                     <a:solidFill>
-                      <a:srgbClr val="15253D"/>
+                      <a:srgbClr val="000030"/>
                     </a:solidFill>
                   </a:tcPr>
                 </a:tc>
@@ -2970,7 +3418,7 @@
                   <a:tcPr marL="109728" marR="109728" marT="109728" marB="109728" anchor="ctr">
                     <a:lnL w="9525" cap="flat" cmpd="sng" algn="ctr">
                       <a:solidFill>
-                        <a:srgbClr val="D5DDE8"/>
+                        <a:srgbClr val="D5E3F2"/>
                       </a:solidFill>
                       <a:prstDash val="solid"/>
                       <a:round/>
@@ -2979,7 +3427,7 @@
                     </a:lnL>
                     <a:lnR w="9525" cap="flat" cmpd="sng" algn="ctr">
                       <a:solidFill>
-                        <a:srgbClr val="D5DDE8"/>
+                        <a:srgbClr val="D5E3F2"/>
                       </a:solidFill>
                       <a:prstDash val="solid"/>
                       <a:round/>
@@ -2988,7 +3436,7 @@
                     </a:lnR>
                     <a:lnT w="9525" cap="flat" cmpd="sng" algn="ctr">
                       <a:solidFill>
-                        <a:srgbClr val="D5DDE8"/>
+                        <a:srgbClr val="D5E3F2"/>
                       </a:solidFill>
                       <a:prstDash val="solid"/>
                       <a:round/>
@@ -2997,7 +3445,7 @@
                     </a:lnT>
                     <a:lnB w="9525" cap="flat" cmpd="sng" algn="ctr">
                       <a:solidFill>
-                        <a:srgbClr val="D5DDE8"/>
+                        <a:srgbClr val="D5E3F2"/>
                       </a:solidFill>
                       <a:prstDash val="solid"/>
                       <a:round/>
@@ -3005,7 +3453,7 @@
                       <a:tailEnd type="none" w="med" len="med"/>
                     </a:lnB>
                     <a:solidFill>
-                      <a:srgbClr val="15253D"/>
+                      <a:srgbClr val="000030"/>
                     </a:solidFill>
                   </a:tcPr>
                 </a:tc>
@@ -3022,7 +3470,7 @@
                       <a:r>
                         <a:rPr lang="en-US" sz="1500" b="1" dirty="0">
                           <a:solidFill>
-                            <a:srgbClr val="0F766E"/>
+                            <a:srgbClr val="2468A8"/>
                           </a:solidFill>
                           <a:latin typeface="Arial" pitchFamily="34" charset="0"/>
                           <a:ea typeface="Arial" pitchFamily="34" charset="-122"/>
@@ -3040,7 +3488,7 @@
                   <a:tcPr marL="109728" marR="109728" marT="109728" marB="109728" anchor="ctr">
                     <a:lnL w="9525" cap="flat" cmpd="sng" algn="ctr">
                       <a:solidFill>
-                        <a:srgbClr val="D5DDE8"/>
+                        <a:srgbClr val="D5E3F2"/>
                       </a:solidFill>
                       <a:prstDash val="solid"/>
                       <a:round/>
@@ -3049,7 +3497,7 @@
                     </a:lnL>
                     <a:lnR w="9525" cap="flat" cmpd="sng" algn="ctr">
                       <a:solidFill>
-                        <a:srgbClr val="D5DDE8"/>
+                        <a:srgbClr val="D5E3F2"/>
                       </a:solidFill>
                       <a:prstDash val="solid"/>
                       <a:round/>
@@ -3058,7 +3506,7 @@
                     </a:lnR>
                     <a:lnT w="9525" cap="flat" cmpd="sng" algn="ctr">
                       <a:solidFill>
-                        <a:srgbClr val="D5DDE8"/>
+                        <a:srgbClr val="D5E3F2"/>
                       </a:solidFill>
                       <a:prstDash val="solid"/>
                       <a:round/>
@@ -3067,7 +3515,7 @@
                     </a:lnT>
                     <a:lnB w="9525" cap="flat" cmpd="sng" algn="ctr">
                       <a:solidFill>
-                        <a:srgbClr val="D5DDE8"/>
+                        <a:srgbClr val="D5E3F2"/>
                       </a:solidFill>
                       <a:prstDash val="solid"/>
                       <a:round/>
@@ -3075,7 +3523,7 @@
                       <a:tailEnd type="none" w="med" len="med"/>
                     </a:lnB>
                     <a:solidFill>
-                      <a:srgbClr val="F4F7FB"/>
+                      <a:srgbClr val="F2F7FC"/>
                     </a:solidFill>
                   </a:tcPr>
                 </a:tc>
@@ -3108,7 +3556,7 @@
                   <a:tcPr marL="109728" marR="109728" marT="109728" marB="109728" anchor="ctr">
                     <a:lnL w="9525" cap="flat" cmpd="sng" algn="ctr">
                       <a:solidFill>
-                        <a:srgbClr val="D5DDE8"/>
+                        <a:srgbClr val="D5E3F2"/>
                       </a:solidFill>
                       <a:prstDash val="solid"/>
                       <a:round/>
@@ -3117,7 +3565,7 @@
                     </a:lnL>
                     <a:lnR w="9525" cap="flat" cmpd="sng" algn="ctr">
                       <a:solidFill>
-                        <a:srgbClr val="D5DDE8"/>
+                        <a:srgbClr val="D5E3F2"/>
                       </a:solidFill>
                       <a:prstDash val="solid"/>
                       <a:round/>
@@ -3126,7 +3574,7 @@
                     </a:lnR>
                     <a:lnT w="9525" cap="flat" cmpd="sng" algn="ctr">
                       <a:solidFill>
-                        <a:srgbClr val="D5DDE8"/>
+                        <a:srgbClr val="D5E3F2"/>
                       </a:solidFill>
                       <a:prstDash val="solid"/>
                       <a:round/>
@@ -3135,7 +3583,7 @@
                     </a:lnT>
                     <a:lnB w="9525" cap="flat" cmpd="sng" algn="ctr">
                       <a:solidFill>
-                        <a:srgbClr val="D5DDE8"/>
+                        <a:srgbClr val="D5E3F2"/>
                       </a:solidFill>
                       <a:prstDash val="solid"/>
                       <a:round/>
@@ -3143,7 +3591,7 @@
                       <a:tailEnd type="none" w="med" len="med"/>
                     </a:lnB>
                     <a:solidFill>
-                      <a:srgbClr val="F4F7FB"/>
+                      <a:srgbClr val="F2F7FC"/>
                     </a:solidFill>
                   </a:tcPr>
                 </a:tc>
@@ -3176,7 +3624,7 @@
                   <a:tcPr marL="109728" marR="109728" marT="109728" marB="109728" anchor="ctr">
                     <a:lnL w="9525" cap="flat" cmpd="sng" algn="ctr">
                       <a:solidFill>
-                        <a:srgbClr val="D5DDE8"/>
+                        <a:srgbClr val="D5E3F2"/>
                       </a:solidFill>
                       <a:prstDash val="solid"/>
                       <a:round/>
@@ -3185,7 +3633,7 @@
                     </a:lnL>
                     <a:lnR w="9525" cap="flat" cmpd="sng" algn="ctr">
                       <a:solidFill>
-                        <a:srgbClr val="D5DDE8"/>
+                        <a:srgbClr val="D5E3F2"/>
                       </a:solidFill>
                       <a:prstDash val="solid"/>
                       <a:round/>
@@ -3194,7 +3642,7 @@
                     </a:lnR>
                     <a:lnT w="9525" cap="flat" cmpd="sng" algn="ctr">
                       <a:solidFill>
-                        <a:srgbClr val="D5DDE8"/>
+                        <a:srgbClr val="D5E3F2"/>
                       </a:solidFill>
                       <a:prstDash val="solid"/>
                       <a:round/>
@@ -3203,7 +3651,7 @@
                     </a:lnT>
                     <a:lnB w="9525" cap="flat" cmpd="sng" algn="ctr">
                       <a:solidFill>
-                        <a:srgbClr val="D5DDE8"/>
+                        <a:srgbClr val="D5E3F2"/>
                       </a:solidFill>
                       <a:prstDash val="solid"/>
                       <a:round/>
@@ -3211,7 +3659,7 @@
                       <a:tailEnd type="none" w="med" len="med"/>
                     </a:lnB>
                     <a:solidFill>
-                      <a:srgbClr val="F4F7FB"/>
+                      <a:srgbClr val="F2F7FC"/>
                     </a:solidFill>
                   </a:tcPr>
                 </a:tc>
@@ -3228,7 +3676,7 @@
                       <a:r>
                         <a:rPr lang="en-US" sz="1500" b="1" dirty="0">
                           <a:solidFill>
-                            <a:srgbClr val="0F766E"/>
+                            <a:srgbClr val="2468A8"/>
                           </a:solidFill>
                           <a:latin typeface="Arial" pitchFamily="34" charset="0"/>
                           <a:ea typeface="Arial" pitchFamily="34" charset="-122"/>
@@ -3246,7 +3694,7 @@
                   <a:tcPr marL="109728" marR="109728" marT="109728" marB="109728" anchor="ctr">
                     <a:lnL w="9525" cap="flat" cmpd="sng" algn="ctr">
                       <a:solidFill>
-                        <a:srgbClr val="D5DDE8"/>
+                        <a:srgbClr val="D5E3F2"/>
                       </a:solidFill>
                       <a:prstDash val="solid"/>
                       <a:round/>
@@ -3255,7 +3703,7 @@
                     </a:lnL>
                     <a:lnR w="9525" cap="flat" cmpd="sng" algn="ctr">
                       <a:solidFill>
-                        <a:srgbClr val="D5DDE8"/>
+                        <a:srgbClr val="D5E3F2"/>
                       </a:solidFill>
                       <a:prstDash val="solid"/>
                       <a:round/>
@@ -3264,7 +3712,7 @@
                     </a:lnR>
                     <a:lnT w="9525" cap="flat" cmpd="sng" algn="ctr">
                       <a:solidFill>
-                        <a:srgbClr val="D5DDE8"/>
+                        <a:srgbClr val="D5E3F2"/>
                       </a:solidFill>
                       <a:prstDash val="solid"/>
                       <a:round/>
@@ -3273,7 +3721,7 @@
                     </a:lnT>
                     <a:lnB w="9525" cap="flat" cmpd="sng" algn="ctr">
                       <a:solidFill>
-                        <a:srgbClr val="D5DDE8"/>
+                        <a:srgbClr val="D5E3F2"/>
                       </a:solidFill>
                       <a:prstDash val="solid"/>
                       <a:round/>
@@ -3314,7 +3762,7 @@
                   <a:tcPr marL="109728" marR="109728" marT="109728" marB="109728" anchor="ctr">
                     <a:lnL w="9525" cap="flat" cmpd="sng" algn="ctr">
                       <a:solidFill>
-                        <a:srgbClr val="D5DDE8"/>
+                        <a:srgbClr val="D5E3F2"/>
                       </a:solidFill>
                       <a:prstDash val="solid"/>
                       <a:round/>
@@ -3323,7 +3771,7 @@
                     </a:lnL>
                     <a:lnR w="9525" cap="flat" cmpd="sng" algn="ctr">
                       <a:solidFill>
-                        <a:srgbClr val="D5DDE8"/>
+                        <a:srgbClr val="D5E3F2"/>
                       </a:solidFill>
                       <a:prstDash val="solid"/>
                       <a:round/>
@@ -3332,7 +3780,7 @@
                     </a:lnR>
                     <a:lnT w="9525" cap="flat" cmpd="sng" algn="ctr">
                       <a:solidFill>
-                        <a:srgbClr val="D5DDE8"/>
+                        <a:srgbClr val="D5E3F2"/>
                       </a:solidFill>
                       <a:prstDash val="solid"/>
                       <a:round/>
@@ -3341,7 +3789,7 @@
                     </a:lnT>
                     <a:lnB w="9525" cap="flat" cmpd="sng" algn="ctr">
                       <a:solidFill>
-                        <a:srgbClr val="D5DDE8"/>
+                        <a:srgbClr val="D5E3F2"/>
                       </a:solidFill>
                       <a:prstDash val="solid"/>
                       <a:round/>
@@ -3382,7 +3830,7 @@
                   <a:tcPr marL="109728" marR="109728" marT="109728" marB="109728" anchor="ctr">
                     <a:lnL w="9525" cap="flat" cmpd="sng" algn="ctr">
                       <a:solidFill>
-                        <a:srgbClr val="D5DDE8"/>
+                        <a:srgbClr val="D5E3F2"/>
                       </a:solidFill>
                       <a:prstDash val="solid"/>
                       <a:round/>
@@ -3391,7 +3839,7 @@
                     </a:lnL>
                     <a:lnR w="9525" cap="flat" cmpd="sng" algn="ctr">
                       <a:solidFill>
-                        <a:srgbClr val="D5DDE8"/>
+                        <a:srgbClr val="D5E3F2"/>
                       </a:solidFill>
                       <a:prstDash val="solid"/>
                       <a:round/>
@@ -3400,7 +3848,7 @@
                     </a:lnR>
                     <a:lnT w="9525" cap="flat" cmpd="sng" algn="ctr">
                       <a:solidFill>
-                        <a:srgbClr val="D5DDE8"/>
+                        <a:srgbClr val="D5E3F2"/>
                       </a:solidFill>
                       <a:prstDash val="solid"/>
                       <a:round/>
@@ -3409,7 +3857,7 @@
                     </a:lnT>
                     <a:lnB w="9525" cap="flat" cmpd="sng" algn="ctr">
                       <a:solidFill>
-                        <a:srgbClr val="D5DDE8"/>
+                        <a:srgbClr val="D5E3F2"/>
                       </a:solidFill>
                       <a:prstDash val="solid"/>
                       <a:round/>
@@ -3434,7 +3882,7 @@
                       <a:r>
                         <a:rPr lang="en-US" sz="1500" b="1" dirty="0">
                           <a:solidFill>
-                            <a:srgbClr val="0F766E"/>
+                            <a:srgbClr val="2468A8"/>
                           </a:solidFill>
                           <a:latin typeface="Arial" pitchFamily="34" charset="0"/>
                           <a:ea typeface="Arial" pitchFamily="34" charset="-122"/>
@@ -3452,7 +3900,7 @@
                   <a:tcPr marL="109728" marR="109728" marT="109728" marB="109728" anchor="ctr">
                     <a:lnL w="9525" cap="flat" cmpd="sng" algn="ctr">
                       <a:solidFill>
-                        <a:srgbClr val="D5DDE8"/>
+                        <a:srgbClr val="D5E3F2"/>
                       </a:solidFill>
                       <a:prstDash val="solid"/>
                       <a:round/>
@@ -3461,7 +3909,7 @@
                     </a:lnL>
                     <a:lnR w="9525" cap="flat" cmpd="sng" algn="ctr">
                       <a:solidFill>
-                        <a:srgbClr val="D5DDE8"/>
+                        <a:srgbClr val="D5E3F2"/>
                       </a:solidFill>
                       <a:prstDash val="solid"/>
                       <a:round/>
@@ -3470,7 +3918,7 @@
                     </a:lnR>
                     <a:lnT w="9525" cap="flat" cmpd="sng" algn="ctr">
                       <a:solidFill>
-                        <a:srgbClr val="D5DDE8"/>
+                        <a:srgbClr val="D5E3F2"/>
                       </a:solidFill>
                       <a:prstDash val="solid"/>
                       <a:round/>
@@ -3479,7 +3927,7 @@
                     </a:lnT>
                     <a:lnB w="9525" cap="flat" cmpd="sng" algn="ctr">
                       <a:solidFill>
-                        <a:srgbClr val="D5DDE8"/>
+                        <a:srgbClr val="D5E3F2"/>
                       </a:solidFill>
                       <a:prstDash val="solid"/>
                       <a:round/>
@@ -3487,7 +3935,7 @@
                       <a:tailEnd type="none" w="med" len="med"/>
                     </a:lnB>
                     <a:solidFill>
-                      <a:srgbClr val="F4F7FB"/>
+                      <a:srgbClr val="F2F7FC"/>
                     </a:solidFill>
                   </a:tcPr>
                 </a:tc>
@@ -3520,7 +3968,7 @@
                   <a:tcPr marL="109728" marR="109728" marT="109728" marB="109728" anchor="ctr">
                     <a:lnL w="9525" cap="flat" cmpd="sng" algn="ctr">
                       <a:solidFill>
-                        <a:srgbClr val="D5DDE8"/>
+                        <a:srgbClr val="D5E3F2"/>
                       </a:solidFill>
                       <a:prstDash val="solid"/>
                       <a:round/>
@@ -3529,7 +3977,7 @@
                     </a:lnL>
                     <a:lnR w="9525" cap="flat" cmpd="sng" algn="ctr">
                       <a:solidFill>
-                        <a:srgbClr val="D5DDE8"/>
+                        <a:srgbClr val="D5E3F2"/>
                       </a:solidFill>
                       <a:prstDash val="solid"/>
                       <a:round/>
@@ -3538,7 +3986,7 @@
                     </a:lnR>
                     <a:lnT w="9525" cap="flat" cmpd="sng" algn="ctr">
                       <a:solidFill>
-                        <a:srgbClr val="D5DDE8"/>
+                        <a:srgbClr val="D5E3F2"/>
                       </a:solidFill>
                       <a:prstDash val="solid"/>
                       <a:round/>
@@ -3547,7 +3995,7 @@
                     </a:lnT>
                     <a:lnB w="9525" cap="flat" cmpd="sng" algn="ctr">
                       <a:solidFill>
-                        <a:srgbClr val="D5DDE8"/>
+                        <a:srgbClr val="D5E3F2"/>
                       </a:solidFill>
                       <a:prstDash val="solid"/>
                       <a:round/>
@@ -3555,7 +4003,7 @@
                       <a:tailEnd type="none" w="med" len="med"/>
                     </a:lnB>
                     <a:solidFill>
-                      <a:srgbClr val="F4F7FB"/>
+                      <a:srgbClr val="F2F7FC"/>
                     </a:solidFill>
                   </a:tcPr>
                 </a:tc>
@@ -3588,7 +4036,7 @@
                   <a:tcPr marL="109728" marR="109728" marT="109728" marB="109728" anchor="ctr">
                     <a:lnL w="9525" cap="flat" cmpd="sng" algn="ctr">
                       <a:solidFill>
-                        <a:srgbClr val="D5DDE8"/>
+                        <a:srgbClr val="D5E3F2"/>
                       </a:solidFill>
                       <a:prstDash val="solid"/>
                       <a:round/>
@@ -3597,7 +4045,7 @@
                     </a:lnL>
                     <a:lnR w="9525" cap="flat" cmpd="sng" algn="ctr">
                       <a:solidFill>
-                        <a:srgbClr val="D5DDE8"/>
+                        <a:srgbClr val="D5E3F2"/>
                       </a:solidFill>
                       <a:prstDash val="solid"/>
                       <a:round/>
@@ -3606,7 +4054,7 @@
                     </a:lnR>
                     <a:lnT w="9525" cap="flat" cmpd="sng" algn="ctr">
                       <a:solidFill>
-                        <a:srgbClr val="D5DDE8"/>
+                        <a:srgbClr val="D5E3F2"/>
                       </a:solidFill>
                       <a:prstDash val="solid"/>
                       <a:round/>
@@ -3615,7 +4063,7 @@
                     </a:lnT>
                     <a:lnB w="9525" cap="flat" cmpd="sng" algn="ctr">
                       <a:solidFill>
-                        <a:srgbClr val="D5DDE8"/>
+                        <a:srgbClr val="D5E3F2"/>
                       </a:solidFill>
                       <a:prstDash val="solid"/>
                       <a:round/>
@@ -3623,7 +4071,7 @@
                       <a:tailEnd type="none" w="med" len="med"/>
                     </a:lnB>
                     <a:solidFill>
-                      <a:srgbClr val="F4F7FB"/>
+                      <a:srgbClr val="F2F7FC"/>
                     </a:solidFill>
                   </a:tcPr>
                 </a:tc>
@@ -3640,7 +4088,7 @@
                       <a:r>
                         <a:rPr lang="en-US" sz="1500" b="1" dirty="0">
                           <a:solidFill>
-                            <a:srgbClr val="0F766E"/>
+                            <a:srgbClr val="2468A8"/>
                           </a:solidFill>
                           <a:latin typeface="Arial" pitchFamily="34" charset="0"/>
                           <a:ea typeface="Arial" pitchFamily="34" charset="-122"/>
@@ -3658,7 +4106,7 @@
                   <a:tcPr marL="109728" marR="109728" marT="109728" marB="109728" anchor="ctr">
                     <a:lnL w="9525" cap="flat" cmpd="sng" algn="ctr">
                       <a:solidFill>
-                        <a:srgbClr val="D5DDE8"/>
+                        <a:srgbClr val="D5E3F2"/>
                       </a:solidFill>
                       <a:prstDash val="solid"/>
                       <a:round/>
@@ -3667,7 +4115,7 @@
                     </a:lnL>
                     <a:lnR w="9525" cap="flat" cmpd="sng" algn="ctr">
                       <a:solidFill>
-                        <a:srgbClr val="D5DDE8"/>
+                        <a:srgbClr val="D5E3F2"/>
                       </a:solidFill>
                       <a:prstDash val="solid"/>
                       <a:round/>
@@ -3676,7 +4124,7 @@
                     </a:lnR>
                     <a:lnT w="9525" cap="flat" cmpd="sng" algn="ctr">
                       <a:solidFill>
-                        <a:srgbClr val="D5DDE8"/>
+                        <a:srgbClr val="D5E3F2"/>
                       </a:solidFill>
                       <a:prstDash val="solid"/>
                       <a:round/>
@@ -3685,7 +4133,7 @@
                     </a:lnT>
                     <a:lnB w="9525" cap="flat" cmpd="sng" algn="ctr">
                       <a:solidFill>
-                        <a:srgbClr val="D5DDE8"/>
+                        <a:srgbClr val="D5E3F2"/>
                       </a:solidFill>
                       <a:prstDash val="solid"/>
                       <a:round/>
@@ -3726,7 +4174,7 @@
                   <a:tcPr marL="109728" marR="109728" marT="109728" marB="109728" anchor="ctr">
                     <a:lnL w="9525" cap="flat" cmpd="sng" algn="ctr">
                       <a:solidFill>
-                        <a:srgbClr val="D5DDE8"/>
+                        <a:srgbClr val="D5E3F2"/>
                       </a:solidFill>
                       <a:prstDash val="solid"/>
                       <a:round/>
@@ -3735,7 +4183,7 @@
                     </a:lnL>
                     <a:lnR w="9525" cap="flat" cmpd="sng" algn="ctr">
                       <a:solidFill>
-                        <a:srgbClr val="D5DDE8"/>
+                        <a:srgbClr val="D5E3F2"/>
                       </a:solidFill>
                       <a:prstDash val="solid"/>
                       <a:round/>
@@ -3744,7 +4192,7 @@
                     </a:lnR>
                     <a:lnT w="9525" cap="flat" cmpd="sng" algn="ctr">
                       <a:solidFill>
-                        <a:srgbClr val="D5DDE8"/>
+                        <a:srgbClr val="D5E3F2"/>
                       </a:solidFill>
                       <a:prstDash val="solid"/>
                       <a:round/>
@@ -3753,7 +4201,7 @@
                     </a:lnT>
                     <a:lnB w="9525" cap="flat" cmpd="sng" algn="ctr">
                       <a:solidFill>
-                        <a:srgbClr val="D5DDE8"/>
+                        <a:srgbClr val="D5E3F2"/>
                       </a:solidFill>
                       <a:prstDash val="solid"/>
                       <a:round/>
@@ -3794,7 +4242,7 @@
                   <a:tcPr marL="109728" marR="109728" marT="109728" marB="109728" anchor="ctr">
                     <a:lnL w="9525" cap="flat" cmpd="sng" algn="ctr">
                       <a:solidFill>
-                        <a:srgbClr val="D5DDE8"/>
+                        <a:srgbClr val="D5E3F2"/>
                       </a:solidFill>
                       <a:prstDash val="solid"/>
                       <a:round/>
@@ -3803,7 +4251,7 @@
                     </a:lnL>
                     <a:lnR w="9525" cap="flat" cmpd="sng" algn="ctr">
                       <a:solidFill>
-                        <a:srgbClr val="D5DDE8"/>
+                        <a:srgbClr val="D5E3F2"/>
                       </a:solidFill>
                       <a:prstDash val="solid"/>
                       <a:round/>
@@ -3812,7 +4260,7 @@
                     </a:lnR>
                     <a:lnT w="9525" cap="flat" cmpd="sng" algn="ctr">
                       <a:solidFill>
-                        <a:srgbClr val="D5DDE8"/>
+                        <a:srgbClr val="D5E3F2"/>
                       </a:solidFill>
                       <a:prstDash val="solid"/>
                       <a:round/>
@@ -3821,7 +4269,7 @@
                     </a:lnT>
                     <a:lnB w="9525" cap="flat" cmpd="sng" algn="ctr">
                       <a:solidFill>
-                        <a:srgbClr val="D5DDE8"/>
+                        <a:srgbClr val="D5E3F2"/>
                       </a:solidFill>
                       <a:prstDash val="solid"/>
                       <a:round/>
@@ -3916,6 +4364,118 @@
           </a:p>
         </p:txBody>
       </p:sp>
+      <p:sp>
+        <p:nvSpPr>
+          <p:cNvPr id="7" name="Rectangle 6"/>
+          <p:cNvSpPr/>
+          <p:nvPr/>
+        </p:nvSpPr>
+        <p:spPr>
+          <a:xfrm>
+            <a:off x="0" y="0"/>
+            <a:ext cx="12192000" cy="82296"/>
+          </a:xfrm>
+          <a:prstGeom prst="rect">
+            <a:avLst/>
+          </a:prstGeom>
+          <a:solidFill>
+            <a:srgbClr val="000030"/>
+          </a:solidFill>
+          <a:ln>
+            <a:noFill/>
+          </a:ln>
+          <a:effectLst/>
+        </p:spPr>
+        <p:style>
+          <a:lnRef idx="1">
+            <a:schemeClr val="accent1"/>
+          </a:lnRef>
+          <a:fillRef idx="3">
+            <a:schemeClr val="accent1"/>
+          </a:fillRef>
+          <a:effectRef idx="2">
+            <a:schemeClr val="accent1"/>
+          </a:effectRef>
+          <a:fontRef idx="minor">
+            <a:schemeClr val="lt1"/>
+          </a:fontRef>
+        </p:style>
+        <p:txBody>
+          <a:bodyPr rtlCol="0" anchor="ctr"/>
+          <a:lstStyle/>
+          <a:p>
+            <a:pPr algn="ctr"/>
+          </a:p>
+        </p:txBody>
+      </p:sp>
+      <p:sp>
+        <p:nvSpPr>
+          <p:cNvPr id="8" name="Rectangle 7"/>
+          <p:cNvSpPr/>
+          <p:nvPr/>
+        </p:nvSpPr>
+        <p:spPr>
+          <a:xfrm>
+            <a:off x="0" y="82296"/>
+            <a:ext cx="1463040" cy="45720"/>
+          </a:xfrm>
+          <a:prstGeom prst="rect">
+            <a:avLst/>
+          </a:prstGeom>
+          <a:solidFill>
+            <a:srgbClr val="3078C0"/>
+          </a:solidFill>
+          <a:ln>
+            <a:noFill/>
+          </a:ln>
+          <a:effectLst/>
+        </p:spPr>
+        <p:style>
+          <a:lnRef idx="1">
+            <a:schemeClr val="accent1"/>
+          </a:lnRef>
+          <a:fillRef idx="3">
+            <a:schemeClr val="accent1"/>
+          </a:fillRef>
+          <a:effectRef idx="2">
+            <a:schemeClr val="accent1"/>
+          </a:effectRef>
+          <a:fontRef idx="minor">
+            <a:schemeClr val="lt1"/>
+          </a:fontRef>
+        </p:style>
+        <p:txBody>
+          <a:bodyPr rtlCol="0" anchor="ctr"/>
+          <a:lstStyle/>
+          <a:p>
+            <a:pPr algn="ctr"/>
+          </a:p>
+        </p:txBody>
+      </p:sp>
+      <p:pic>
+        <p:nvPicPr>
+          <p:cNvPr id="9" name="Picture 8" descr="taash_logo.png"/>
+          <p:cNvPicPr>
+            <a:picLocks noChangeAspect="1"/>
+          </p:cNvPicPr>
+          <p:nvPr/>
+        </p:nvPicPr>
+        <p:blipFill>
+          <a:blip r:embed="rId3"/>
+          <a:stretch>
+            <a:fillRect/>
+          </a:stretch>
+        </p:blipFill>
+        <p:spPr>
+          <a:xfrm>
+            <a:off x="10363200" y="6369664"/>
+            <a:ext cx="1005840" cy="318303"/>
+          </a:xfrm>
+          <a:prstGeom prst="rect">
+            <a:avLst/>
+          </a:prstGeom>
+        </p:spPr>
+      </p:pic>
     </p:spTree>
   </p:cSld>
   <p:clrMapOvr>
@@ -3975,7 +4535,7 @@
             <a:r>
               <a:rPr lang="en-US" sz="2600" b="1" dirty="0">
                 <a:solidFill>
-                  <a:srgbClr val="15253D"/>
+                  <a:srgbClr val="000030"/>
                 </a:solidFill>
                 <a:latin typeface="Arial" pitchFamily="34" charset="0"/>
                 <a:ea typeface="Arial" pitchFamily="34" charset="-122"/>
@@ -4083,7 +4643,7 @@
                   <a:tcPr marL="109728" marR="109728" marT="109728" marB="109728" anchor="ctr">
                     <a:lnL w="9525" cap="flat" cmpd="sng" algn="ctr">
                       <a:solidFill>
-                        <a:srgbClr val="D5DDE8"/>
+                        <a:srgbClr val="D5E3F2"/>
                       </a:solidFill>
                       <a:prstDash val="solid"/>
                       <a:round/>
@@ -4092,7 +4652,7 @@
                     </a:lnL>
                     <a:lnR w="9525" cap="flat" cmpd="sng" algn="ctr">
                       <a:solidFill>
-                        <a:srgbClr val="D5DDE8"/>
+                        <a:srgbClr val="D5E3F2"/>
                       </a:solidFill>
                       <a:prstDash val="solid"/>
                       <a:round/>
@@ -4101,7 +4661,7 @@
                     </a:lnR>
                     <a:lnT w="9525" cap="flat" cmpd="sng" algn="ctr">
                       <a:solidFill>
-                        <a:srgbClr val="D5DDE8"/>
+                        <a:srgbClr val="D5E3F2"/>
                       </a:solidFill>
                       <a:prstDash val="solid"/>
                       <a:round/>
@@ -4110,7 +4670,7 @@
                     </a:lnT>
                     <a:lnB w="9525" cap="flat" cmpd="sng" algn="ctr">
                       <a:solidFill>
-                        <a:srgbClr val="D5DDE8"/>
+                        <a:srgbClr val="D5E3F2"/>
                       </a:solidFill>
                       <a:prstDash val="solid"/>
                       <a:round/>
@@ -4118,7 +4678,7 @@
                       <a:tailEnd type="none" w="med" len="med"/>
                     </a:lnB>
                     <a:solidFill>
-                      <a:srgbClr val="15253D"/>
+                      <a:srgbClr val="000030"/>
                     </a:solidFill>
                   </a:tcPr>
                 </a:tc>
@@ -4151,7 +4711,7 @@
                   <a:tcPr marL="109728" marR="109728" marT="109728" marB="109728" anchor="ctr">
                     <a:lnL w="9525" cap="flat" cmpd="sng" algn="ctr">
                       <a:solidFill>
-                        <a:srgbClr val="D5DDE8"/>
+                        <a:srgbClr val="D5E3F2"/>
                       </a:solidFill>
                       <a:prstDash val="solid"/>
                       <a:round/>
@@ -4160,7 +4720,7 @@
                     </a:lnL>
                     <a:lnR w="9525" cap="flat" cmpd="sng" algn="ctr">
                       <a:solidFill>
-                        <a:srgbClr val="D5DDE8"/>
+                        <a:srgbClr val="D5E3F2"/>
                       </a:solidFill>
                       <a:prstDash val="solid"/>
                       <a:round/>
@@ -4169,7 +4729,7 @@
                     </a:lnR>
                     <a:lnT w="9525" cap="flat" cmpd="sng" algn="ctr">
                       <a:solidFill>
-                        <a:srgbClr val="D5DDE8"/>
+                        <a:srgbClr val="D5E3F2"/>
                       </a:solidFill>
                       <a:prstDash val="solid"/>
                       <a:round/>
@@ -4178,7 +4738,7 @@
                     </a:lnT>
                     <a:lnB w="9525" cap="flat" cmpd="sng" algn="ctr">
                       <a:solidFill>
-                        <a:srgbClr val="D5DDE8"/>
+                        <a:srgbClr val="D5E3F2"/>
                       </a:solidFill>
                       <a:prstDash val="solid"/>
                       <a:round/>
@@ -4186,7 +4746,7 @@
                       <a:tailEnd type="none" w="med" len="med"/>
                     </a:lnB>
                     <a:solidFill>
-                      <a:srgbClr val="15253D"/>
+                      <a:srgbClr val="000030"/>
                     </a:solidFill>
                   </a:tcPr>
                 </a:tc>
@@ -4219,7 +4779,7 @@
                   <a:tcPr marL="109728" marR="109728" marT="109728" marB="109728" anchor="ctr">
                     <a:lnL w="9525" cap="flat" cmpd="sng" algn="ctr">
                       <a:solidFill>
-                        <a:srgbClr val="D5DDE8"/>
+                        <a:srgbClr val="D5E3F2"/>
                       </a:solidFill>
                       <a:prstDash val="solid"/>
                       <a:round/>
@@ -4228,7 +4788,7 @@
                     </a:lnL>
                     <a:lnR w="9525" cap="flat" cmpd="sng" algn="ctr">
                       <a:solidFill>
-                        <a:srgbClr val="D5DDE8"/>
+                        <a:srgbClr val="D5E3F2"/>
                       </a:solidFill>
                       <a:prstDash val="solid"/>
                       <a:round/>
@@ -4237,7 +4797,7 @@
                     </a:lnR>
                     <a:lnT w="9525" cap="flat" cmpd="sng" algn="ctr">
                       <a:solidFill>
-                        <a:srgbClr val="D5DDE8"/>
+                        <a:srgbClr val="D5E3F2"/>
                       </a:solidFill>
                       <a:prstDash val="solid"/>
                       <a:round/>
@@ -4246,7 +4806,7 @@
                     </a:lnT>
                     <a:lnB w="9525" cap="flat" cmpd="sng" algn="ctr">
                       <a:solidFill>
-                        <a:srgbClr val="D5DDE8"/>
+                        <a:srgbClr val="D5E3F2"/>
                       </a:solidFill>
                       <a:prstDash val="solid"/>
                       <a:round/>
@@ -4254,7 +4814,7 @@
                       <a:tailEnd type="none" w="med" len="med"/>
                     </a:lnB>
                     <a:solidFill>
-                      <a:srgbClr val="15253D"/>
+                      <a:srgbClr val="000030"/>
                     </a:solidFill>
                   </a:tcPr>
                 </a:tc>
@@ -4271,7 +4831,7 @@
                       <a:r>
                         <a:rPr lang="en-US" sz="1500" b="1" dirty="0">
                           <a:solidFill>
-                            <a:srgbClr val="0F766E"/>
+                            <a:srgbClr val="2468A8"/>
                           </a:solidFill>
                           <a:latin typeface="Arial" pitchFamily="34" charset="0"/>
                           <a:ea typeface="Arial" pitchFamily="34" charset="-122"/>
@@ -4289,7 +4849,7 @@
                   <a:tcPr marL="109728" marR="109728" marT="109728" marB="109728" anchor="ctr">
                     <a:lnL w="9525" cap="flat" cmpd="sng" algn="ctr">
                       <a:solidFill>
-                        <a:srgbClr val="D5DDE8"/>
+                        <a:srgbClr val="D5E3F2"/>
                       </a:solidFill>
                       <a:prstDash val="solid"/>
                       <a:round/>
@@ -4298,7 +4858,7 @@
                     </a:lnL>
                     <a:lnR w="9525" cap="flat" cmpd="sng" algn="ctr">
                       <a:solidFill>
-                        <a:srgbClr val="D5DDE8"/>
+                        <a:srgbClr val="D5E3F2"/>
                       </a:solidFill>
                       <a:prstDash val="solid"/>
                       <a:round/>
@@ -4307,7 +4867,7 @@
                     </a:lnR>
                     <a:lnT w="9525" cap="flat" cmpd="sng" algn="ctr">
                       <a:solidFill>
-                        <a:srgbClr val="D5DDE8"/>
+                        <a:srgbClr val="D5E3F2"/>
                       </a:solidFill>
                       <a:prstDash val="solid"/>
                       <a:round/>
@@ -4316,7 +4876,7 @@
                     </a:lnT>
                     <a:lnB w="9525" cap="flat" cmpd="sng" algn="ctr">
                       <a:solidFill>
-                        <a:srgbClr val="D5DDE8"/>
+                        <a:srgbClr val="D5E3F2"/>
                       </a:solidFill>
                       <a:prstDash val="solid"/>
                       <a:round/>
@@ -4324,7 +4884,7 @@
                       <a:tailEnd type="none" w="med" len="med"/>
                     </a:lnB>
                     <a:solidFill>
-                      <a:srgbClr val="F4F7FB"/>
+                      <a:srgbClr val="F2F7FC"/>
                     </a:solidFill>
                   </a:tcPr>
                 </a:tc>
@@ -4357,7 +4917,7 @@
                   <a:tcPr marL="109728" marR="109728" marT="109728" marB="109728" anchor="ctr">
                     <a:lnL w="9525" cap="flat" cmpd="sng" algn="ctr">
                       <a:solidFill>
-                        <a:srgbClr val="D5DDE8"/>
+                        <a:srgbClr val="D5E3F2"/>
                       </a:solidFill>
                       <a:prstDash val="solid"/>
                       <a:round/>
@@ -4366,7 +4926,7 @@
                     </a:lnL>
                     <a:lnR w="9525" cap="flat" cmpd="sng" algn="ctr">
                       <a:solidFill>
-                        <a:srgbClr val="D5DDE8"/>
+                        <a:srgbClr val="D5E3F2"/>
                       </a:solidFill>
                       <a:prstDash val="solid"/>
                       <a:round/>
@@ -4375,7 +4935,7 @@
                     </a:lnR>
                     <a:lnT w="9525" cap="flat" cmpd="sng" algn="ctr">
                       <a:solidFill>
-                        <a:srgbClr val="D5DDE8"/>
+                        <a:srgbClr val="D5E3F2"/>
                       </a:solidFill>
                       <a:prstDash val="solid"/>
                       <a:round/>
@@ -4384,7 +4944,7 @@
                     </a:lnT>
                     <a:lnB w="9525" cap="flat" cmpd="sng" algn="ctr">
                       <a:solidFill>
-                        <a:srgbClr val="D5DDE8"/>
+                        <a:srgbClr val="D5E3F2"/>
                       </a:solidFill>
                       <a:prstDash val="solid"/>
                       <a:round/>
@@ -4392,7 +4952,7 @@
                       <a:tailEnd type="none" w="med" len="med"/>
                     </a:lnB>
                     <a:solidFill>
-                      <a:srgbClr val="F4F7FB"/>
+                      <a:srgbClr val="F2F7FC"/>
                     </a:solidFill>
                   </a:tcPr>
                 </a:tc>
@@ -4425,7 +4985,7 @@
                   <a:tcPr marL="109728" marR="109728" marT="109728" marB="109728" anchor="ctr">
                     <a:lnL w="9525" cap="flat" cmpd="sng" algn="ctr">
                       <a:solidFill>
-                        <a:srgbClr val="D5DDE8"/>
+                        <a:srgbClr val="D5E3F2"/>
                       </a:solidFill>
                       <a:prstDash val="solid"/>
                       <a:round/>
@@ -4434,7 +4994,7 @@
                     </a:lnL>
                     <a:lnR w="9525" cap="flat" cmpd="sng" algn="ctr">
                       <a:solidFill>
-                        <a:srgbClr val="D5DDE8"/>
+                        <a:srgbClr val="D5E3F2"/>
                       </a:solidFill>
                       <a:prstDash val="solid"/>
                       <a:round/>
@@ -4443,7 +5003,7 @@
                     </a:lnR>
                     <a:lnT w="9525" cap="flat" cmpd="sng" algn="ctr">
                       <a:solidFill>
-                        <a:srgbClr val="D5DDE8"/>
+                        <a:srgbClr val="D5E3F2"/>
                       </a:solidFill>
                       <a:prstDash val="solid"/>
                       <a:round/>
@@ -4452,7 +5012,7 @@
                     </a:lnT>
                     <a:lnB w="9525" cap="flat" cmpd="sng" algn="ctr">
                       <a:solidFill>
-                        <a:srgbClr val="D5DDE8"/>
+                        <a:srgbClr val="D5E3F2"/>
                       </a:solidFill>
                       <a:prstDash val="solid"/>
                       <a:round/>
@@ -4460,7 +5020,7 @@
                       <a:tailEnd type="none" w="med" len="med"/>
                     </a:lnB>
                     <a:solidFill>
-                      <a:srgbClr val="F4F7FB"/>
+                      <a:srgbClr val="F2F7FC"/>
                     </a:solidFill>
                   </a:tcPr>
                 </a:tc>
@@ -4477,7 +5037,7 @@
                       <a:r>
                         <a:rPr lang="en-US" sz="1500" b="1" dirty="0">
                           <a:solidFill>
-                            <a:srgbClr val="0F766E"/>
+                            <a:srgbClr val="2468A8"/>
                           </a:solidFill>
                           <a:latin typeface="Arial" pitchFamily="34" charset="0"/>
                           <a:ea typeface="Arial" pitchFamily="34" charset="-122"/>
@@ -4495,7 +5055,7 @@
                   <a:tcPr marL="109728" marR="109728" marT="109728" marB="109728" anchor="ctr">
                     <a:lnL w="9525" cap="flat" cmpd="sng" algn="ctr">
                       <a:solidFill>
-                        <a:srgbClr val="D5DDE8"/>
+                        <a:srgbClr val="D5E3F2"/>
                       </a:solidFill>
                       <a:prstDash val="solid"/>
                       <a:round/>
@@ -4504,7 +5064,7 @@
                     </a:lnL>
                     <a:lnR w="9525" cap="flat" cmpd="sng" algn="ctr">
                       <a:solidFill>
-                        <a:srgbClr val="D5DDE8"/>
+                        <a:srgbClr val="D5E3F2"/>
                       </a:solidFill>
                       <a:prstDash val="solid"/>
                       <a:round/>
@@ -4513,7 +5073,7 @@
                     </a:lnR>
                     <a:lnT w="9525" cap="flat" cmpd="sng" algn="ctr">
                       <a:solidFill>
-                        <a:srgbClr val="D5DDE8"/>
+                        <a:srgbClr val="D5E3F2"/>
                       </a:solidFill>
                       <a:prstDash val="solid"/>
                       <a:round/>
@@ -4522,7 +5082,7 @@
                     </a:lnT>
                     <a:lnB w="9525" cap="flat" cmpd="sng" algn="ctr">
                       <a:solidFill>
-                        <a:srgbClr val="D5DDE8"/>
+                        <a:srgbClr val="D5E3F2"/>
                       </a:solidFill>
                       <a:prstDash val="solid"/>
                       <a:round/>
@@ -4563,7 +5123,7 @@
                   <a:tcPr marL="109728" marR="109728" marT="109728" marB="109728" anchor="ctr">
                     <a:lnL w="9525" cap="flat" cmpd="sng" algn="ctr">
                       <a:solidFill>
-                        <a:srgbClr val="D5DDE8"/>
+                        <a:srgbClr val="D5E3F2"/>
                       </a:solidFill>
                       <a:prstDash val="solid"/>
                       <a:round/>
@@ -4572,7 +5132,7 @@
                     </a:lnL>
                     <a:lnR w="9525" cap="flat" cmpd="sng" algn="ctr">
                       <a:solidFill>
-                        <a:srgbClr val="D5DDE8"/>
+                        <a:srgbClr val="D5E3F2"/>
                       </a:solidFill>
                       <a:prstDash val="solid"/>
                       <a:round/>
@@ -4581,7 +5141,7 @@
                     </a:lnR>
                     <a:lnT w="9525" cap="flat" cmpd="sng" algn="ctr">
                       <a:solidFill>
-                        <a:srgbClr val="D5DDE8"/>
+                        <a:srgbClr val="D5E3F2"/>
                       </a:solidFill>
                       <a:prstDash val="solid"/>
                       <a:round/>
@@ -4590,7 +5150,7 @@
                     </a:lnT>
                     <a:lnB w="9525" cap="flat" cmpd="sng" algn="ctr">
                       <a:solidFill>
-                        <a:srgbClr val="D5DDE8"/>
+                        <a:srgbClr val="D5E3F2"/>
                       </a:solidFill>
                       <a:prstDash val="solid"/>
                       <a:round/>
@@ -4631,7 +5191,7 @@
                   <a:tcPr marL="109728" marR="109728" marT="109728" marB="109728" anchor="ctr">
                     <a:lnL w="9525" cap="flat" cmpd="sng" algn="ctr">
                       <a:solidFill>
-                        <a:srgbClr val="D5DDE8"/>
+                        <a:srgbClr val="D5E3F2"/>
                       </a:solidFill>
                       <a:prstDash val="solid"/>
                       <a:round/>
@@ -4640,7 +5200,7 @@
                     </a:lnL>
                     <a:lnR w="9525" cap="flat" cmpd="sng" algn="ctr">
                       <a:solidFill>
-                        <a:srgbClr val="D5DDE8"/>
+                        <a:srgbClr val="D5E3F2"/>
                       </a:solidFill>
                       <a:prstDash val="solid"/>
                       <a:round/>
@@ -4649,7 +5209,7 @@
                     </a:lnR>
                     <a:lnT w="9525" cap="flat" cmpd="sng" algn="ctr">
                       <a:solidFill>
-                        <a:srgbClr val="D5DDE8"/>
+                        <a:srgbClr val="D5E3F2"/>
                       </a:solidFill>
                       <a:prstDash val="solid"/>
                       <a:round/>
@@ -4658,7 +5218,7 @@
                     </a:lnT>
                     <a:lnB w="9525" cap="flat" cmpd="sng" algn="ctr">
                       <a:solidFill>
-                        <a:srgbClr val="D5DDE8"/>
+                        <a:srgbClr val="D5E3F2"/>
                       </a:solidFill>
                       <a:prstDash val="solid"/>
                       <a:round/>
@@ -4683,7 +5243,7 @@
                       <a:r>
                         <a:rPr lang="en-US" sz="1500" b="1" dirty="0">
                           <a:solidFill>
-                            <a:srgbClr val="0F766E"/>
+                            <a:srgbClr val="2468A8"/>
                           </a:solidFill>
                           <a:latin typeface="Arial" pitchFamily="34" charset="0"/>
                           <a:ea typeface="Arial" pitchFamily="34" charset="-122"/>
@@ -4701,7 +5261,7 @@
                   <a:tcPr marL="109728" marR="109728" marT="109728" marB="109728" anchor="ctr">
                     <a:lnL w="9525" cap="flat" cmpd="sng" algn="ctr">
                       <a:solidFill>
-                        <a:srgbClr val="D5DDE8"/>
+                        <a:srgbClr val="D5E3F2"/>
                       </a:solidFill>
                       <a:prstDash val="solid"/>
                       <a:round/>
@@ -4710,7 +5270,7 @@
                     </a:lnL>
                     <a:lnR w="9525" cap="flat" cmpd="sng" algn="ctr">
                       <a:solidFill>
-                        <a:srgbClr val="D5DDE8"/>
+                        <a:srgbClr val="D5E3F2"/>
                       </a:solidFill>
                       <a:prstDash val="solid"/>
                       <a:round/>
@@ -4719,7 +5279,7 @@
                     </a:lnR>
                     <a:lnT w="9525" cap="flat" cmpd="sng" algn="ctr">
                       <a:solidFill>
-                        <a:srgbClr val="D5DDE8"/>
+                        <a:srgbClr val="D5E3F2"/>
                       </a:solidFill>
                       <a:prstDash val="solid"/>
                       <a:round/>
@@ -4728,7 +5288,7 @@
                     </a:lnT>
                     <a:lnB w="9525" cap="flat" cmpd="sng" algn="ctr">
                       <a:solidFill>
-                        <a:srgbClr val="D5DDE8"/>
+                        <a:srgbClr val="D5E3F2"/>
                       </a:solidFill>
                       <a:prstDash val="solid"/>
                       <a:round/>
@@ -4736,7 +5296,7 @@
                       <a:tailEnd type="none" w="med" len="med"/>
                     </a:lnB>
                     <a:solidFill>
-                      <a:srgbClr val="F4F7FB"/>
+                      <a:srgbClr val="F2F7FC"/>
                     </a:solidFill>
                   </a:tcPr>
                 </a:tc>
@@ -4769,7 +5329,7 @@
                   <a:tcPr marL="109728" marR="109728" marT="109728" marB="109728" anchor="ctr">
                     <a:lnL w="9525" cap="flat" cmpd="sng" algn="ctr">
                       <a:solidFill>
-                        <a:srgbClr val="D5DDE8"/>
+                        <a:srgbClr val="D5E3F2"/>
                       </a:solidFill>
                       <a:prstDash val="solid"/>
                       <a:round/>
@@ -4778,7 +5338,7 @@
                     </a:lnL>
                     <a:lnR w="9525" cap="flat" cmpd="sng" algn="ctr">
                       <a:solidFill>
-                        <a:srgbClr val="D5DDE8"/>
+                        <a:srgbClr val="D5E3F2"/>
                       </a:solidFill>
                       <a:prstDash val="solid"/>
                       <a:round/>
@@ -4787,7 +5347,7 @@
                     </a:lnR>
                     <a:lnT w="9525" cap="flat" cmpd="sng" algn="ctr">
                       <a:solidFill>
-                        <a:srgbClr val="D5DDE8"/>
+                        <a:srgbClr val="D5E3F2"/>
                       </a:solidFill>
                       <a:prstDash val="solid"/>
                       <a:round/>
@@ -4796,7 +5356,7 @@
                     </a:lnT>
                     <a:lnB w="9525" cap="flat" cmpd="sng" algn="ctr">
                       <a:solidFill>
-                        <a:srgbClr val="D5DDE8"/>
+                        <a:srgbClr val="D5E3F2"/>
                       </a:solidFill>
                       <a:prstDash val="solid"/>
                       <a:round/>
@@ -4804,7 +5364,7 @@
                       <a:tailEnd type="none" w="med" len="med"/>
                     </a:lnB>
                     <a:solidFill>
-                      <a:srgbClr val="F4F7FB"/>
+                      <a:srgbClr val="F2F7FC"/>
                     </a:solidFill>
                   </a:tcPr>
                 </a:tc>
@@ -4837,7 +5397,7 @@
                   <a:tcPr marL="109728" marR="109728" marT="109728" marB="109728" anchor="ctr">
                     <a:lnL w="9525" cap="flat" cmpd="sng" algn="ctr">
                       <a:solidFill>
-                        <a:srgbClr val="D5DDE8"/>
+                        <a:srgbClr val="D5E3F2"/>
                       </a:solidFill>
                       <a:prstDash val="solid"/>
                       <a:round/>
@@ -4846,7 +5406,7 @@
                     </a:lnL>
                     <a:lnR w="9525" cap="flat" cmpd="sng" algn="ctr">
                       <a:solidFill>
-                        <a:srgbClr val="D5DDE8"/>
+                        <a:srgbClr val="D5E3F2"/>
                       </a:solidFill>
                       <a:prstDash val="solid"/>
                       <a:round/>
@@ -4855,7 +5415,7 @@
                     </a:lnR>
                     <a:lnT w="9525" cap="flat" cmpd="sng" algn="ctr">
                       <a:solidFill>
-                        <a:srgbClr val="D5DDE8"/>
+                        <a:srgbClr val="D5E3F2"/>
                       </a:solidFill>
                       <a:prstDash val="solid"/>
                       <a:round/>
@@ -4864,7 +5424,7 @@
                     </a:lnT>
                     <a:lnB w="9525" cap="flat" cmpd="sng" algn="ctr">
                       <a:solidFill>
-                        <a:srgbClr val="D5DDE8"/>
+                        <a:srgbClr val="D5E3F2"/>
                       </a:solidFill>
                       <a:prstDash val="solid"/>
                       <a:round/>
@@ -4872,7 +5432,7 @@
                       <a:tailEnd type="none" w="med" len="med"/>
                     </a:lnB>
                     <a:solidFill>
-                      <a:srgbClr val="F4F7FB"/>
+                      <a:srgbClr val="F2F7FC"/>
                     </a:solidFill>
                   </a:tcPr>
                 </a:tc>
@@ -4959,6 +5519,118 @@
           </a:p>
         </p:txBody>
       </p:sp>
+      <p:sp>
+        <p:nvSpPr>
+          <p:cNvPr id="8" name="Rectangle 7"/>
+          <p:cNvSpPr/>
+          <p:nvPr/>
+        </p:nvSpPr>
+        <p:spPr>
+          <a:xfrm>
+            <a:off x="0" y="0"/>
+            <a:ext cx="12192000" cy="82296"/>
+          </a:xfrm>
+          <a:prstGeom prst="rect">
+            <a:avLst/>
+          </a:prstGeom>
+          <a:solidFill>
+            <a:srgbClr val="000030"/>
+          </a:solidFill>
+          <a:ln>
+            <a:noFill/>
+          </a:ln>
+          <a:effectLst/>
+        </p:spPr>
+        <p:style>
+          <a:lnRef idx="1">
+            <a:schemeClr val="accent1"/>
+          </a:lnRef>
+          <a:fillRef idx="3">
+            <a:schemeClr val="accent1"/>
+          </a:fillRef>
+          <a:effectRef idx="2">
+            <a:schemeClr val="accent1"/>
+          </a:effectRef>
+          <a:fontRef idx="minor">
+            <a:schemeClr val="lt1"/>
+          </a:fontRef>
+        </p:style>
+        <p:txBody>
+          <a:bodyPr rtlCol="0" anchor="ctr"/>
+          <a:lstStyle/>
+          <a:p>
+            <a:pPr algn="ctr"/>
+          </a:p>
+        </p:txBody>
+      </p:sp>
+      <p:sp>
+        <p:nvSpPr>
+          <p:cNvPr id="9" name="Rectangle 8"/>
+          <p:cNvSpPr/>
+          <p:nvPr/>
+        </p:nvSpPr>
+        <p:spPr>
+          <a:xfrm>
+            <a:off x="0" y="82296"/>
+            <a:ext cx="1463040" cy="45720"/>
+          </a:xfrm>
+          <a:prstGeom prst="rect">
+            <a:avLst/>
+          </a:prstGeom>
+          <a:solidFill>
+            <a:srgbClr val="3078C0"/>
+          </a:solidFill>
+          <a:ln>
+            <a:noFill/>
+          </a:ln>
+          <a:effectLst/>
+        </p:spPr>
+        <p:style>
+          <a:lnRef idx="1">
+            <a:schemeClr val="accent1"/>
+          </a:lnRef>
+          <a:fillRef idx="3">
+            <a:schemeClr val="accent1"/>
+          </a:fillRef>
+          <a:effectRef idx="2">
+            <a:schemeClr val="accent1"/>
+          </a:effectRef>
+          <a:fontRef idx="minor">
+            <a:schemeClr val="lt1"/>
+          </a:fontRef>
+        </p:style>
+        <p:txBody>
+          <a:bodyPr rtlCol="0" anchor="ctr"/>
+          <a:lstStyle/>
+          <a:p>
+            <a:pPr algn="ctr"/>
+          </a:p>
+        </p:txBody>
+      </p:sp>
+      <p:pic>
+        <p:nvPicPr>
+          <p:cNvPr id="10" name="Picture 9" descr="taash_logo.png"/>
+          <p:cNvPicPr>
+            <a:picLocks noChangeAspect="1"/>
+          </p:cNvPicPr>
+          <p:nvPr/>
+        </p:nvPicPr>
+        <p:blipFill>
+          <a:blip r:embed="rId3"/>
+          <a:stretch>
+            <a:fillRect/>
+          </a:stretch>
+        </p:blipFill>
+        <p:spPr>
+          <a:xfrm>
+            <a:off x="10363200" y="6369664"/>
+            <a:ext cx="1005840" cy="318303"/>
+          </a:xfrm>
+          <a:prstGeom prst="rect">
+            <a:avLst/>
+          </a:prstGeom>
+        </p:spPr>
+      </p:pic>
     </p:spTree>
   </p:cSld>
   <p:clrMapOvr>
@@ -5018,7 +5690,7 @@
             <a:r>
               <a:rPr lang="en-US" sz="2600" b="1" dirty="0">
                 <a:solidFill>
-                  <a:srgbClr val="15253D"/>
+                  <a:srgbClr val="000030"/>
                 </a:solidFill>
                 <a:latin typeface="Arial" pitchFamily="34" charset="0"/>
                 <a:ea typeface="Arial" pitchFamily="34" charset="-122"/>
@@ -5057,7 +5729,7 @@
             <a:r>
               <a:rPr lang="en-US" sz="1500" b="1" dirty="0">
                 <a:solidFill>
-                  <a:srgbClr val="0F766E"/>
+                  <a:srgbClr val="2468A8"/>
                 </a:solidFill>
                 <a:latin typeface="Arial" pitchFamily="34" charset="0"/>
                 <a:ea typeface="Arial" pitchFamily="34" charset="-122"/>
@@ -5202,7 +5874,7 @@
             <a:r>
               <a:rPr lang="en-US" sz="1500" b="1" dirty="0">
                 <a:solidFill>
-                  <a:srgbClr val="EA580C"/>
+                  <a:srgbClr val="3078C0"/>
                 </a:solidFill>
                 <a:latin typeface="Arial" pitchFamily="34" charset="0"/>
                 <a:ea typeface="Arial" pitchFamily="34" charset="-122"/>
@@ -5229,11 +5901,11 @@
             <a:avLst/>
           </a:prstGeom>
           <a:solidFill>
-            <a:srgbClr val="F4F7FB"/>
+            <a:srgbClr val="F2F7FC"/>
           </a:solidFill>
           <a:ln w="12700">
             <a:solidFill>
-              <a:srgbClr val="F4F7FB"/>
+              <a:srgbClr val="F2F7FC"/>
             </a:solidFill>
             <a:prstDash val="solid"/>
           </a:ln>
@@ -5373,11 +6045,11 @@
             <a:avLst/>
           </a:prstGeom>
           <a:solidFill>
-            <a:srgbClr val="F4F7FB"/>
+            <a:srgbClr val="F2F7FC"/>
           </a:solidFill>
           <a:ln w="12700">
             <a:solidFill>
-              <a:srgbClr val="F4F7FB"/>
+              <a:srgbClr val="F2F7FC"/>
             </a:solidFill>
             <a:prstDash val="solid"/>
           </a:ln>
@@ -5517,11 +6189,11 @@
             <a:avLst/>
           </a:prstGeom>
           <a:solidFill>
-            <a:srgbClr val="F4F7FB"/>
+            <a:srgbClr val="F2F7FC"/>
           </a:solidFill>
           <a:ln w="12700">
             <a:solidFill>
-              <a:srgbClr val="F4F7FB"/>
+              <a:srgbClr val="F2F7FC"/>
             </a:solidFill>
             <a:prstDash val="solid"/>
           </a:ln>
@@ -5661,11 +6333,11 @@
             <a:avLst/>
           </a:prstGeom>
           <a:solidFill>
-            <a:srgbClr val="F4F7FB"/>
+            <a:srgbClr val="F2F7FC"/>
           </a:solidFill>
           <a:ln w="12700">
             <a:solidFill>
-              <a:srgbClr val="F4F7FB"/>
+              <a:srgbClr val="F2F7FC"/>
             </a:solidFill>
             <a:prstDash val="solid"/>
           </a:ln>
@@ -5868,6 +6540,118 @@
           </a:p>
         </p:txBody>
       </p:sp>
+      <p:sp>
+        <p:nvSpPr>
+          <p:cNvPr id="24" name="Rectangle 23"/>
+          <p:cNvSpPr/>
+          <p:nvPr/>
+        </p:nvSpPr>
+        <p:spPr>
+          <a:xfrm>
+            <a:off x="0" y="0"/>
+            <a:ext cx="12192000" cy="82296"/>
+          </a:xfrm>
+          <a:prstGeom prst="rect">
+            <a:avLst/>
+          </a:prstGeom>
+          <a:solidFill>
+            <a:srgbClr val="000030"/>
+          </a:solidFill>
+          <a:ln>
+            <a:noFill/>
+          </a:ln>
+          <a:effectLst/>
+        </p:spPr>
+        <p:style>
+          <a:lnRef idx="1">
+            <a:schemeClr val="accent1"/>
+          </a:lnRef>
+          <a:fillRef idx="3">
+            <a:schemeClr val="accent1"/>
+          </a:fillRef>
+          <a:effectRef idx="2">
+            <a:schemeClr val="accent1"/>
+          </a:effectRef>
+          <a:fontRef idx="minor">
+            <a:schemeClr val="lt1"/>
+          </a:fontRef>
+        </p:style>
+        <p:txBody>
+          <a:bodyPr rtlCol="0" anchor="ctr"/>
+          <a:lstStyle/>
+          <a:p>
+            <a:pPr algn="ctr"/>
+          </a:p>
+        </p:txBody>
+      </p:sp>
+      <p:sp>
+        <p:nvSpPr>
+          <p:cNvPr id="25" name="Rectangle 24"/>
+          <p:cNvSpPr/>
+          <p:nvPr/>
+        </p:nvSpPr>
+        <p:spPr>
+          <a:xfrm>
+            <a:off x="0" y="82296"/>
+            <a:ext cx="1463040" cy="45720"/>
+          </a:xfrm>
+          <a:prstGeom prst="rect">
+            <a:avLst/>
+          </a:prstGeom>
+          <a:solidFill>
+            <a:srgbClr val="3078C0"/>
+          </a:solidFill>
+          <a:ln>
+            <a:noFill/>
+          </a:ln>
+          <a:effectLst/>
+        </p:spPr>
+        <p:style>
+          <a:lnRef idx="1">
+            <a:schemeClr val="accent1"/>
+          </a:lnRef>
+          <a:fillRef idx="3">
+            <a:schemeClr val="accent1"/>
+          </a:fillRef>
+          <a:effectRef idx="2">
+            <a:schemeClr val="accent1"/>
+          </a:effectRef>
+          <a:fontRef idx="minor">
+            <a:schemeClr val="lt1"/>
+          </a:fontRef>
+        </p:style>
+        <p:txBody>
+          <a:bodyPr rtlCol="0" anchor="ctr"/>
+          <a:lstStyle/>
+          <a:p>
+            <a:pPr algn="ctr"/>
+          </a:p>
+        </p:txBody>
+      </p:sp>
+      <p:pic>
+        <p:nvPicPr>
+          <p:cNvPr id="26" name="Picture 25" descr="taash_logo.png"/>
+          <p:cNvPicPr>
+            <a:picLocks noChangeAspect="1"/>
+          </p:cNvPicPr>
+          <p:nvPr/>
+        </p:nvPicPr>
+        <p:blipFill>
+          <a:blip r:embed="rId3"/>
+          <a:stretch>
+            <a:fillRect/>
+          </a:stretch>
+        </p:blipFill>
+        <p:spPr>
+          <a:xfrm>
+            <a:off x="10363200" y="6369664"/>
+            <a:ext cx="1005840" cy="318303"/>
+          </a:xfrm>
+          <a:prstGeom prst="rect">
+            <a:avLst/>
+          </a:prstGeom>
+        </p:spPr>
+      </p:pic>
     </p:spTree>
   </p:cSld>
   <p:clrMapOvr>
